--- a/public/fun/cards/care/명함_병원약국돌봄_11_네이비.pptx
+++ b/public/fun/cards/care/명함_병원약국돌봄_11_네이비.pptx
@@ -3700,8 +3700,8 @@
         </p:nvSpPr>
         <p:spPr>
           <a:xfrm>
-            <a:off x="252000" y="424800"/>
-            <a:ext cx="540000" cy="237600"/>
+            <a:off x="252000" y="496800"/>
+            <a:ext cx="360000" cy="144000"/>
           </a:xfrm>
           <a:prstGeom prst="rect">
             <a:avLst/>
@@ -3716,11 +3716,11 @@
           <a:p>
             <a:pPr algn="l">
               <a:lnSpc>
-                <a:spcPts val="2175"/>
+                <a:spcPts val="927"/>
               </a:lnSpc>
             </a:pPr>
             <a:r>
-              <a:rPr sz="1500" b="1">
+              <a:rPr sz="640" b="1" spc="120">
                 <a:solidFill>
                   <a:srgbClr val="806CB8"/>
                 </a:solidFill>
@@ -3740,8 +3740,8 @@
         </p:nvSpPr>
         <p:spPr>
           <a:xfrm>
-            <a:off x="720000" y="475200"/>
-            <a:ext cx="1512000" cy="180000"/>
+            <a:off x="576000" y="475200"/>
+            <a:ext cx="1656000" cy="180000"/>
           </a:xfrm>
           <a:prstGeom prst="rect">
             <a:avLst/>
@@ -3780,8 +3780,8 @@
         </p:nvSpPr>
         <p:spPr>
           <a:xfrm>
-            <a:off x="252000" y="691200"/>
-            <a:ext cx="540000" cy="237600"/>
+            <a:off x="252000" y="763200"/>
+            <a:ext cx="360000" cy="144000"/>
           </a:xfrm>
           <a:prstGeom prst="rect">
             <a:avLst/>
@@ -3796,11 +3796,11 @@
           <a:p>
             <a:pPr algn="l">
               <a:lnSpc>
-                <a:spcPts val="2175"/>
+                <a:spcPts val="927"/>
               </a:lnSpc>
             </a:pPr>
             <a:r>
-              <a:rPr sz="1500" b="1">
+              <a:rPr sz="640" b="1" spc="120">
                 <a:solidFill>
                   <a:srgbClr val="806CB8"/>
                 </a:solidFill>
@@ -3820,8 +3820,8 @@
         </p:nvSpPr>
         <p:spPr>
           <a:xfrm>
-            <a:off x="720000" y="741600"/>
-            <a:ext cx="1512000" cy="180000"/>
+            <a:off x="576000" y="741600"/>
+            <a:ext cx="1656000" cy="180000"/>
           </a:xfrm>
           <a:prstGeom prst="rect">
             <a:avLst/>
@@ -3860,8 +3860,8 @@
         </p:nvSpPr>
         <p:spPr>
           <a:xfrm>
-            <a:off x="252000" y="957600"/>
-            <a:ext cx="540000" cy="237600"/>
+            <a:off x="252000" y="1029600"/>
+            <a:ext cx="360000" cy="144000"/>
           </a:xfrm>
           <a:prstGeom prst="rect">
             <a:avLst/>
@@ -3876,11 +3876,11 @@
           <a:p>
             <a:pPr algn="l">
               <a:lnSpc>
-                <a:spcPts val="2175"/>
+                <a:spcPts val="927"/>
               </a:lnSpc>
             </a:pPr>
             <a:r>
-              <a:rPr sz="1500" b="1">
+              <a:rPr sz="640" b="1" spc="120">
                 <a:solidFill>
                   <a:srgbClr val="806CB8"/>
                 </a:solidFill>
@@ -3900,8 +3900,8 @@
         </p:nvSpPr>
         <p:spPr>
           <a:xfrm>
-            <a:off x="720000" y="1008000"/>
-            <a:ext cx="1512000" cy="180000"/>
+            <a:off x="576000" y="1008000"/>
+            <a:ext cx="1656000" cy="180000"/>
           </a:xfrm>
           <a:prstGeom prst="rect">
             <a:avLst/>
